--- a/presentation/an-all-weather-analyst-v3.pptx
+++ b/presentation/an-all-weather-analyst-v3.pptx
@@ -19140,7 +19140,7 @@
                 <a:ea typeface="Calibri" pitchFamily="34" charset="-122"/>
                 <a:cs typeface="Calibri" pitchFamily="34" charset="-120"/>
               </a:rPr>
-              <a:t>Point it at a miner</a:t>
+              <a:t>Point it at a company in the mining sector</a:t>
             </a:r>
             <a:endParaRPr lang="en-US" sz="1600" dirty="0"/>
           </a:p>
